--- a/Sangyan_Suraksha_Deck.pptx
+++ b/Sangyan_Suraksha_Deck.pptx
@@ -1712,7 +1712,7 @@
                   <a:srgbClr val="DBA04B"/>
                 </a:solidFill>
               </a:rPr>
-              <a:t>Track A + B + E  |  Voice-first, Hindi + English, runs fully in the browser</a:t>
+              <a:t>Track A + B + E  |  Voice-first, Hindi + English, Node.js backend, nothing stored</a:t>
             </a:r>
             <a:endParaRPr lang="en-US" sz="1300" dirty="0"/>
           </a:p>
@@ -2909,7 +2909,7 @@
                   </a:extLst>
                 </a:hlinkClick>
               </a:rPr>
-              <a:t>Live demo: https://claude.ai/artifact/WuY41p3WKy2KeW3EexNUAm</a:t>
+              <a:t>Live demo: https://anuragtiwari-ux.github.io/Sangyan-Suraksha/</a:t>
             </a:r>
             <a:endParaRPr lang="en-US" sz="1300" dirty="0"/>
           </a:p>
@@ -3135,7 +3135,7 @@
                   <a:srgbClr val="2A1A1A"/>
                 </a:solidFill>
               </a:rPr>
-              <a:t>Single-page web app, no backend. Rule engine (regex + weighted scoring) for Hindi and English. Web Speech API for spoken results. Low-bandwidth: one small file, works on low-end phones.</a:t>
+              <a:t>Web app + zero-dependency Node.js API (POST /api/analyze). Rule engine (regex + weighted scoring) for Hindi and English; falls back to on-device checking if the server is down. Web Speech API for spoken results. Low-bandwidth: one small file, works on low-end phones.</a:t>
             </a:r>
             <a:endParaRPr lang="en-US" sz="1250" dirty="0"/>
           </a:p>
@@ -3276,7 +3276,7 @@
                   <a:srgbClr val="2A1A1A"/>
                 </a:solidFill>
               </a:rPr>
-              <a:t>Privacy by design: user pastes content; processing stays on the device; nothing stored; no SMS/OTP access.</a:t>
+              <a:t>Privacy by design: user pastes content; the stateless API stores and logs nothing; no SMS/OTP access.</a:t>
             </a:r>
             <a:endParaRPr lang="en-US" sz="1250" dirty="0"/>
           </a:p>
@@ -4598,7 +4598,7 @@
                   <a:srgbClr val="2A1A1A"/>
                 </a:solidFill>
               </a:rPr>
-              <a:t>Visible checklist: no tips or predictions, no monetisation, no SMS/OTP access, everything on-device, reasons and limits instead of verdicts. Also a large-text mode for senior citizens and Hindi/English toggle.</a:t>
+              <a:t>Visible checklist: no tips or predictions, no monetisation, no SMS/OTP access, nothing stored or logged, reasons and limits instead of verdicts. Also a large-text mode for senior citizens and Hindi/English toggle.</a:t>
             </a:r>
             <a:endParaRPr lang="en-US" sz="1250" dirty="0"/>
           </a:p>
